--- a/ppt/MH_Grade10/MH10_S41_Effects_of_Electric_Current_1.pptx
+++ b/ppt/MH_Grade10/MH10_S41_Effects_of_Electric_Current_1.pptx
@@ -11614,7 +11614,7 @@
         </p:nvSpPr>
         <p:spPr>
           <a:xfrm>
-            <a:off x="640080" y="1828800"/>
+            <a:off x="640080" y="1874519"/>
             <a:ext cx="10881360" cy="4114800"/>
           </a:xfrm>
           <a:prstGeom prst="roundRect">
@@ -11660,22 +11660,68 @@
       </p:sp>
       <p:sp>
         <p:nvSpPr>
-          <p:cNvPr id="7" name="TextBox 6"/>
+          <p:cNvPr id="7" name="Rounded Rectangle 6"/>
+          <p:cNvSpPr/>
+          <p:nvPr/>
+        </p:nvSpPr>
+        <p:spPr>
+          <a:xfrm>
+            <a:off x="1051560" y="2381097"/>
+            <a:ext cx="100584" cy="545668"/>
+          </a:xfrm>
+          <a:prstGeom prst="roundRect">
+            <a:avLst>
+              <a:gd name="adj" fmla="val 50000"/>
+            </a:avLst>
+          </a:prstGeom>
+          <a:solidFill>
+            <a:srgbClr val="0A9396"/>
+          </a:solidFill>
+          <a:ln>
+            <a:noFill/>
+          </a:ln>
+          <a:effectLst/>
+        </p:spPr>
+        <p:style>
+          <a:lnRef idx="1">
+            <a:schemeClr val="accent1"/>
+          </a:lnRef>
+          <a:fillRef idx="3">
+            <a:schemeClr val="accent1"/>
+          </a:fillRef>
+          <a:effectRef idx="2">
+            <a:schemeClr val="accent1"/>
+          </a:effectRef>
+          <a:fontRef idx="minor">
+            <a:schemeClr val="lt1"/>
+          </a:fontRef>
+        </p:style>
+        <p:txBody>
+          <a:bodyPr rtlCol="0" anchor="ctr"/>
+          <a:lstStyle/>
+          <a:p>
+            <a:pPr algn="ctr"/>
+          </a:p>
+        </p:txBody>
+      </p:sp>
+      <p:sp>
+        <p:nvSpPr>
+          <p:cNvPr id="8" name="TextBox 7"/>
           <p:cNvSpPr txBox="1"/>
           <p:nvPr/>
         </p:nvSpPr>
         <p:spPr>
           <a:xfrm>
-            <a:off x="1005840" y="2103120"/>
-            <a:ext cx="10058400" cy="3657600"/>
-          </a:xfrm>
-          <a:prstGeom prst="rect">
-            <a:avLst/>
-          </a:prstGeom>
-          <a:noFill/>
-        </p:spPr>
-        <p:txBody>
-          <a:bodyPr wrap="square" anchor="t" lIns="0" rIns="0" tIns="0" bIns="0">
+            <a:off x="1371600" y="2240279"/>
+            <a:ext cx="9784080" cy="880109"/>
+          </a:xfrm>
+          <a:prstGeom prst="rect">
+            <a:avLst/>
+          </a:prstGeom>
+          <a:noFill/>
+        </p:spPr>
+        <p:txBody>
+          <a:bodyPr wrap="square" anchor="ctr" lIns="0" rIns="0" tIns="0" bIns="0">
             <a:spAutoFit/>
           </a:bodyPr>
           <a:lstStyle/>
@@ -11684,21 +11730,9 @@
               <a:lnSpc>
                 <a:spcPct val="105000"/>
               </a:lnSpc>
-              <a:spcAft>
-                <a:spcPts val="1100"/>
-              </a:spcAft>
             </a:pPr>
             <a:r>
-              <a:rPr sz="1600" b="1" i="0">
-                <a:solidFill>
-                  <a:srgbClr val="F4801A"/>
-                </a:solidFill>
-                <a:latin typeface="Calibri"/>
-              </a:rPr>
-              <a:t>•  </a:t>
-            </a:r>
-            <a:r>
-              <a:rPr sz="1600" b="0" i="0">
+              <a:rPr sz="1700" b="0" i="0">
                 <a:solidFill>
                   <a:srgbClr val="1D2433"/>
                 </a:solidFill>
@@ -11707,26 +11741,83 @@
               <a:t>In 1820, Hans Christian Oersted found that a compass needle placed near a current-carrying wire is deflected.</a:t>
             </a:r>
           </a:p>
+        </p:txBody>
+      </p:sp>
+      <p:sp>
+        <p:nvSpPr>
+          <p:cNvPr id="9" name="Rounded Rectangle 8"/>
+          <p:cNvSpPr/>
+          <p:nvPr/>
+        </p:nvSpPr>
+        <p:spPr>
+          <a:xfrm>
+            <a:off x="1051560" y="3261207"/>
+            <a:ext cx="100584" cy="545668"/>
+          </a:xfrm>
+          <a:prstGeom prst="roundRect">
+            <a:avLst>
+              <a:gd name="adj" fmla="val 50000"/>
+            </a:avLst>
+          </a:prstGeom>
+          <a:solidFill>
+            <a:srgbClr val="F4801A"/>
+          </a:solidFill>
+          <a:ln>
+            <a:noFill/>
+          </a:ln>
+          <a:effectLst/>
+        </p:spPr>
+        <p:style>
+          <a:lnRef idx="1">
+            <a:schemeClr val="accent1"/>
+          </a:lnRef>
+          <a:fillRef idx="3">
+            <a:schemeClr val="accent1"/>
+          </a:fillRef>
+          <a:effectRef idx="2">
+            <a:schemeClr val="accent1"/>
+          </a:effectRef>
+          <a:fontRef idx="minor">
+            <a:schemeClr val="lt1"/>
+          </a:fontRef>
+        </p:style>
+        <p:txBody>
+          <a:bodyPr rtlCol="0" anchor="ctr"/>
+          <a:lstStyle/>
+          <a:p>
+            <a:pPr algn="ctr"/>
+          </a:p>
+        </p:txBody>
+      </p:sp>
+      <p:sp>
+        <p:nvSpPr>
+          <p:cNvPr id="10" name="TextBox 9"/>
+          <p:cNvSpPr txBox="1"/>
+          <p:nvPr/>
+        </p:nvSpPr>
+        <p:spPr>
+          <a:xfrm>
+            <a:off x="1371600" y="3120389"/>
+            <a:ext cx="9784080" cy="880109"/>
+          </a:xfrm>
+          <a:prstGeom prst="rect">
+            <a:avLst/>
+          </a:prstGeom>
+          <a:noFill/>
+        </p:spPr>
+        <p:txBody>
+          <a:bodyPr wrap="square" anchor="ctr" lIns="0" rIns="0" tIns="0" bIns="0">
+            <a:spAutoFit/>
+          </a:bodyPr>
+          <a:lstStyle/>
           <a:p>
             <a:pPr algn="l">
               <a:lnSpc>
                 <a:spcPct val="105000"/>
               </a:lnSpc>
-              <a:spcAft>
-                <a:spcPts val="1100"/>
-              </a:spcAft>
             </a:pPr>
             <a:r>
-              <a:rPr sz="1600" b="1" i="0">
-                <a:solidFill>
-                  <a:srgbClr val="F4801A"/>
-                </a:solidFill>
-                <a:latin typeface="Calibri"/>
-              </a:rPr>
-              <a:t>•  </a:t>
-            </a:r>
-            <a:r>
-              <a:rPr sz="1600" b="0" i="0">
+              <a:rPr sz="1700" b="0" i="0">
                 <a:solidFill>
                   <a:srgbClr val="1D2433"/>
                 </a:solidFill>
@@ -11735,26 +11826,83 @@
               <a:t>The needle deflects only when current flows in the wire, and returns to normal when the current is switched off.</a:t>
             </a:r>
           </a:p>
+        </p:txBody>
+      </p:sp>
+      <p:sp>
+        <p:nvSpPr>
+          <p:cNvPr id="11" name="Rounded Rectangle 10"/>
+          <p:cNvSpPr/>
+          <p:nvPr/>
+        </p:nvSpPr>
+        <p:spPr>
+          <a:xfrm>
+            <a:off x="1051560" y="4141317"/>
+            <a:ext cx="100584" cy="545668"/>
+          </a:xfrm>
+          <a:prstGeom prst="roundRect">
+            <a:avLst>
+              <a:gd name="adj" fmla="val 50000"/>
+            </a:avLst>
+          </a:prstGeom>
+          <a:solidFill>
+            <a:srgbClr val="6A4C93"/>
+          </a:solidFill>
+          <a:ln>
+            <a:noFill/>
+          </a:ln>
+          <a:effectLst/>
+        </p:spPr>
+        <p:style>
+          <a:lnRef idx="1">
+            <a:schemeClr val="accent1"/>
+          </a:lnRef>
+          <a:fillRef idx="3">
+            <a:schemeClr val="accent1"/>
+          </a:fillRef>
+          <a:effectRef idx="2">
+            <a:schemeClr val="accent1"/>
+          </a:effectRef>
+          <a:fontRef idx="minor">
+            <a:schemeClr val="lt1"/>
+          </a:fontRef>
+        </p:style>
+        <p:txBody>
+          <a:bodyPr rtlCol="0" anchor="ctr"/>
+          <a:lstStyle/>
+          <a:p>
+            <a:pPr algn="ctr"/>
+          </a:p>
+        </p:txBody>
+      </p:sp>
+      <p:sp>
+        <p:nvSpPr>
+          <p:cNvPr id="12" name="TextBox 11"/>
+          <p:cNvSpPr txBox="1"/>
+          <p:nvPr/>
+        </p:nvSpPr>
+        <p:spPr>
+          <a:xfrm>
+            <a:off x="1371600" y="4000500"/>
+            <a:ext cx="9784080" cy="880109"/>
+          </a:xfrm>
+          <a:prstGeom prst="rect">
+            <a:avLst/>
+          </a:prstGeom>
+          <a:noFill/>
+        </p:spPr>
+        <p:txBody>
+          <a:bodyPr wrap="square" anchor="ctr" lIns="0" rIns="0" tIns="0" bIns="0">
+            <a:spAutoFit/>
+          </a:bodyPr>
+          <a:lstStyle/>
           <a:p>
             <a:pPr algn="l">
               <a:lnSpc>
                 <a:spcPct val="105000"/>
               </a:lnSpc>
-              <a:spcAft>
-                <a:spcPts val="1100"/>
-              </a:spcAft>
             </a:pPr>
             <a:r>
-              <a:rPr sz="1600" b="1" i="0">
-                <a:solidFill>
-                  <a:srgbClr val="F4801A"/>
-                </a:solidFill>
-                <a:latin typeface="Calibri"/>
-              </a:rPr>
-              <a:t>•  </a:t>
-            </a:r>
-            <a:r>
-              <a:rPr sz="1600" b="0" i="0">
+              <a:rPr sz="1700" b="0" i="0">
                 <a:solidFill>
                   <a:srgbClr val="1D2433"/>
                 </a:solidFill>
@@ -11763,26 +11911,83 @@
               <a:t>Reversing the direction of the current reverses the direction of the deflection.</a:t>
             </a:r>
           </a:p>
+        </p:txBody>
+      </p:sp>
+      <p:sp>
+        <p:nvSpPr>
+          <p:cNvPr id="13" name="Rounded Rectangle 12"/>
+          <p:cNvSpPr/>
+          <p:nvPr/>
+        </p:nvSpPr>
+        <p:spPr>
+          <a:xfrm>
+            <a:off x="1051560" y="5021427"/>
+            <a:ext cx="100584" cy="545668"/>
+          </a:xfrm>
+          <a:prstGeom prst="roundRect">
+            <a:avLst>
+              <a:gd name="adj" fmla="val 50000"/>
+            </a:avLst>
+          </a:prstGeom>
+          <a:solidFill>
+            <a:srgbClr val="E63946"/>
+          </a:solidFill>
+          <a:ln>
+            <a:noFill/>
+          </a:ln>
+          <a:effectLst/>
+        </p:spPr>
+        <p:style>
+          <a:lnRef idx="1">
+            <a:schemeClr val="accent1"/>
+          </a:lnRef>
+          <a:fillRef idx="3">
+            <a:schemeClr val="accent1"/>
+          </a:fillRef>
+          <a:effectRef idx="2">
+            <a:schemeClr val="accent1"/>
+          </a:effectRef>
+          <a:fontRef idx="minor">
+            <a:schemeClr val="lt1"/>
+          </a:fontRef>
+        </p:style>
+        <p:txBody>
+          <a:bodyPr rtlCol="0" anchor="ctr"/>
+          <a:lstStyle/>
+          <a:p>
+            <a:pPr algn="ctr"/>
+          </a:p>
+        </p:txBody>
+      </p:sp>
+      <p:sp>
+        <p:nvSpPr>
+          <p:cNvPr id="14" name="TextBox 13"/>
+          <p:cNvSpPr txBox="1"/>
+          <p:nvPr/>
+        </p:nvSpPr>
+        <p:spPr>
+          <a:xfrm>
+            <a:off x="1371600" y="4880609"/>
+            <a:ext cx="9784080" cy="880109"/>
+          </a:xfrm>
+          <a:prstGeom prst="rect">
+            <a:avLst/>
+          </a:prstGeom>
+          <a:noFill/>
+        </p:spPr>
+        <p:txBody>
+          <a:bodyPr wrap="square" anchor="ctr" lIns="0" rIns="0" tIns="0" bIns="0">
+            <a:spAutoFit/>
+          </a:bodyPr>
+          <a:lstStyle/>
           <a:p>
             <a:pPr algn="l">
               <a:lnSpc>
                 <a:spcPct val="105000"/>
               </a:lnSpc>
-              <a:spcAft>
-                <a:spcPts val="1100"/>
-              </a:spcAft>
             </a:pPr>
             <a:r>
-              <a:rPr sz="1600" b="1" i="0">
-                <a:solidFill>
-                  <a:srgbClr val="F4801A"/>
-                </a:solidFill>
-                <a:latin typeface="Calibri"/>
-              </a:rPr>
-              <a:t>•  </a:t>
-            </a:r>
-            <a:r>
-              <a:rPr sz="1600" b="0" i="0">
+              <a:rPr sz="1700" b="0" i="0">
                 <a:solidFill>
                   <a:srgbClr val="1D2433"/>
                 </a:solidFill>
@@ -12061,8 +12266,8 @@
         </p:nvSpPr>
         <p:spPr>
           <a:xfrm>
-            <a:off x="1143000" y="2057400"/>
-            <a:ext cx="5029200" cy="411480"/>
+            <a:off x="1188720" y="2103120"/>
+            <a:ext cx="5029200" cy="457200"/>
           </a:xfrm>
           <a:prstGeom prst="rect">
             <a:avLst/>
@@ -12096,8 +12301,8 @@
         </p:nvSpPr>
         <p:spPr>
           <a:xfrm>
-            <a:off x="1143000" y="2606040"/>
-            <a:ext cx="5074920" cy="3063240"/>
+            <a:off x="1188720" y="2697480"/>
+            <a:ext cx="5029200" cy="3108959"/>
           </a:xfrm>
           <a:prstGeom prst="rect">
             <a:avLst/>
@@ -12112,14 +12317,14 @@
           <a:p>
             <a:pPr algn="l">
               <a:lnSpc>
-                <a:spcPct val="105000"/>
+                <a:spcPct val="106000"/>
               </a:lnSpc>
               <a:spcAft>
                 <a:spcPts val="900"/>
               </a:spcAft>
             </a:pPr>
             <a:r>
-              <a:rPr sz="1500" b="1" i="0">
+              <a:rPr sz="1300" b="1" i="0">
                 <a:solidFill>
                   <a:srgbClr val="F4801A"/>
                 </a:solidFill>
@@ -12128,7 +12333,7 @@
               <a:t>•  </a:t>
             </a:r>
             <a:r>
-              <a:rPr sz="1500" b="0" i="0">
+              <a:rPr sz="1300" b="0" i="0">
                 <a:solidFill>
                   <a:srgbClr val="1D2433"/>
                 </a:solidFill>
@@ -12140,14 +12345,14 @@
           <a:p>
             <a:pPr algn="l">
               <a:lnSpc>
-                <a:spcPct val="105000"/>
+                <a:spcPct val="106000"/>
               </a:lnSpc>
               <a:spcAft>
                 <a:spcPts val="900"/>
               </a:spcAft>
             </a:pPr>
             <a:r>
-              <a:rPr sz="1500" b="1" i="0">
+              <a:rPr sz="1300" b="1" i="0">
                 <a:solidFill>
                   <a:srgbClr val="F4801A"/>
                 </a:solidFill>
@@ -12156,7 +12361,7 @@
               <a:t>•  </a:t>
             </a:r>
             <a:r>
-              <a:rPr sz="1500" b="0" i="0">
+              <a:rPr sz="1300" b="0" i="0">
                 <a:solidFill>
                   <a:srgbClr val="1D2433"/>
                 </a:solidFill>
@@ -12168,14 +12373,14 @@
           <a:p>
             <a:pPr algn="l">
               <a:lnSpc>
-                <a:spcPct val="105000"/>
+                <a:spcPct val="106000"/>
               </a:lnSpc>
               <a:spcAft>
                 <a:spcPts val="900"/>
               </a:spcAft>
             </a:pPr>
             <a:r>
-              <a:rPr sz="1500" b="1" i="0">
+              <a:rPr sz="1300" b="1" i="0">
                 <a:solidFill>
                   <a:srgbClr val="F4801A"/>
                 </a:solidFill>
@@ -12184,7 +12389,7 @@
               <a:t>•  </a:t>
             </a:r>
             <a:r>
-              <a:rPr sz="1500" b="0" i="0">
+              <a:rPr sz="1300" b="0" i="0">
                 <a:solidFill>
                   <a:srgbClr val="1D2433"/>
                 </a:solidFill>
@@ -13643,8 +13848,8 @@
         </p:nvSpPr>
         <p:spPr>
           <a:xfrm>
-            <a:off x="1143000" y="2057400"/>
-            <a:ext cx="5029200" cy="411480"/>
+            <a:off x="1188720" y="2103120"/>
+            <a:ext cx="5029200" cy="457200"/>
           </a:xfrm>
           <a:prstGeom prst="rect">
             <a:avLst/>
@@ -13678,8 +13883,8 @@
         </p:nvSpPr>
         <p:spPr>
           <a:xfrm>
-            <a:off x="1143000" y="2606040"/>
-            <a:ext cx="5074920" cy="3063240"/>
+            <a:off x="1188720" y="2697480"/>
+            <a:ext cx="5029200" cy="3108959"/>
           </a:xfrm>
           <a:prstGeom prst="rect">
             <a:avLst/>
@@ -13694,14 +13899,14 @@
           <a:p>
             <a:pPr algn="l">
               <a:lnSpc>
-                <a:spcPct val="105000"/>
+                <a:spcPct val="106000"/>
               </a:lnSpc>
               <a:spcAft>
                 <a:spcPts val="900"/>
               </a:spcAft>
             </a:pPr>
             <a:r>
-              <a:rPr sz="1500" b="1" i="0">
+              <a:rPr sz="1300" b="1" i="0">
                 <a:solidFill>
                   <a:srgbClr val="F4801A"/>
                 </a:solidFill>
@@ -13710,7 +13915,7 @@
               <a:t>•  </a:t>
             </a:r>
             <a:r>
-              <a:rPr sz="1500" b="0" i="0">
+              <a:rPr sz="1300" b="0" i="0">
                 <a:solidFill>
                   <a:srgbClr val="1D2433"/>
                 </a:solidFill>
@@ -13722,14 +13927,14 @@
           <a:p>
             <a:pPr algn="l">
               <a:lnSpc>
-                <a:spcPct val="105000"/>
+                <a:spcPct val="106000"/>
               </a:lnSpc>
               <a:spcAft>
                 <a:spcPts val="900"/>
               </a:spcAft>
             </a:pPr>
             <a:r>
-              <a:rPr sz="1500" b="1" i="0">
+              <a:rPr sz="1300" b="1" i="0">
                 <a:solidFill>
                   <a:srgbClr val="F4801A"/>
                 </a:solidFill>
@@ -13738,7 +13943,7 @@
               <a:t>•  </a:t>
             </a:r>
             <a:r>
-              <a:rPr sz="1500" b="0" i="0">
+              <a:rPr sz="1300" b="0" i="0">
                 <a:solidFill>
                   <a:srgbClr val="1D2433"/>
                 </a:solidFill>
@@ -13750,14 +13955,14 @@
           <a:p>
             <a:pPr algn="l">
               <a:lnSpc>
-                <a:spcPct val="105000"/>
+                <a:spcPct val="106000"/>
               </a:lnSpc>
               <a:spcAft>
                 <a:spcPts val="900"/>
               </a:spcAft>
             </a:pPr>
             <a:r>
-              <a:rPr sz="1500" b="1" i="0">
+              <a:rPr sz="1300" b="1" i="0">
                 <a:solidFill>
                   <a:srgbClr val="F4801A"/>
                 </a:solidFill>
@@ -13766,7 +13971,7 @@
               <a:t>•  </a:t>
             </a:r>
             <a:r>
-              <a:rPr sz="1500" b="0" i="0">
+              <a:rPr sz="1300" b="0" i="0">
                 <a:solidFill>
                   <a:srgbClr val="1D2433"/>
                 </a:solidFill>
@@ -13778,14 +13983,14 @@
           <a:p>
             <a:pPr algn="l">
               <a:lnSpc>
-                <a:spcPct val="105000"/>
+                <a:spcPct val="106000"/>
               </a:lnSpc>
               <a:spcAft>
                 <a:spcPts val="900"/>
               </a:spcAft>
             </a:pPr>
             <a:r>
-              <a:rPr sz="1500" b="1" i="0">
+              <a:rPr sz="1300" b="1" i="0">
                 <a:solidFill>
                   <a:srgbClr val="F4801A"/>
                 </a:solidFill>
@@ -13794,7 +13999,7 @@
               <a:t>•  </a:t>
             </a:r>
             <a:r>
-              <a:rPr sz="1500" b="0" i="0">
+              <a:rPr sz="1300" b="0" i="0">
                 <a:solidFill>
                   <a:srgbClr val="1D2433"/>
                 </a:solidFill>
@@ -22886,8 +23091,8 @@
         </p:nvSpPr>
         <p:spPr>
           <a:xfrm>
-            <a:off x="1143000" y="2057400"/>
-            <a:ext cx="5029200" cy="411480"/>
+            <a:off x="1188720" y="2103120"/>
+            <a:ext cx="5029200" cy="457200"/>
           </a:xfrm>
           <a:prstGeom prst="rect">
             <a:avLst/>
@@ -22921,8 +23126,8 @@
         </p:nvSpPr>
         <p:spPr>
           <a:xfrm>
-            <a:off x="1143000" y="2606040"/>
-            <a:ext cx="5074920" cy="3063240"/>
+            <a:off x="1188720" y="2697480"/>
+            <a:ext cx="5029200" cy="3108959"/>
           </a:xfrm>
           <a:prstGeom prst="rect">
             <a:avLst/>
@@ -22937,14 +23142,14 @@
           <a:p>
             <a:pPr algn="l">
               <a:lnSpc>
-                <a:spcPct val="105000"/>
+                <a:spcPct val="106000"/>
               </a:lnSpc>
               <a:spcAft>
                 <a:spcPts val="900"/>
               </a:spcAft>
             </a:pPr>
             <a:r>
-              <a:rPr sz="1500" b="1" i="0">
+              <a:rPr sz="1300" b="1" i="0">
                 <a:solidFill>
                   <a:srgbClr val="F4801A"/>
                 </a:solidFill>
@@ -22953,7 +23158,7 @@
               <a:t>•  </a:t>
             </a:r>
             <a:r>
-              <a:rPr sz="1500" b="0" i="0">
+              <a:rPr sz="1300" b="0" i="0">
                 <a:solidFill>
                   <a:srgbClr val="1D2433"/>
                 </a:solidFill>
@@ -22965,14 +23170,14 @@
           <a:p>
             <a:pPr algn="l">
               <a:lnSpc>
-                <a:spcPct val="105000"/>
+                <a:spcPct val="106000"/>
               </a:lnSpc>
               <a:spcAft>
                 <a:spcPts val="900"/>
               </a:spcAft>
             </a:pPr>
             <a:r>
-              <a:rPr sz="1500" b="1" i="0">
+              <a:rPr sz="1300" b="1" i="0">
                 <a:solidFill>
                   <a:srgbClr val="F4801A"/>
                 </a:solidFill>
@@ -22981,7 +23186,7 @@
               <a:t>•  </a:t>
             </a:r>
             <a:r>
-              <a:rPr sz="1500" b="0" i="0">
+              <a:rPr sz="1300" b="0" i="0">
                 <a:solidFill>
                   <a:srgbClr val="1D2433"/>
                 </a:solidFill>
@@ -22993,14 +23198,14 @@
           <a:p>
             <a:pPr algn="l">
               <a:lnSpc>
-                <a:spcPct val="105000"/>
+                <a:spcPct val="106000"/>
               </a:lnSpc>
               <a:spcAft>
                 <a:spcPts val="900"/>
               </a:spcAft>
             </a:pPr>
             <a:r>
-              <a:rPr sz="1500" b="1" i="0">
+              <a:rPr sz="1300" b="1" i="0">
                 <a:solidFill>
                   <a:srgbClr val="F4801A"/>
                 </a:solidFill>
@@ -23009,7 +23214,7 @@
               <a:t>•  </a:t>
             </a:r>
             <a:r>
-              <a:rPr sz="1500" b="0" i="0">
+              <a:rPr sz="1300" b="0" i="0">
                 <a:solidFill>
                   <a:srgbClr val="1D2433"/>
                 </a:solidFill>
@@ -23021,14 +23226,14 @@
           <a:p>
             <a:pPr algn="l">
               <a:lnSpc>
-                <a:spcPct val="105000"/>
+                <a:spcPct val="106000"/>
               </a:lnSpc>
               <a:spcAft>
                 <a:spcPts val="900"/>
               </a:spcAft>
             </a:pPr>
             <a:r>
-              <a:rPr sz="1500" b="1" i="0">
+              <a:rPr sz="1300" b="1" i="0">
                 <a:solidFill>
                   <a:srgbClr val="F4801A"/>
                 </a:solidFill>
@@ -23037,7 +23242,7 @@
               <a:t>•  </a:t>
             </a:r>
             <a:r>
-              <a:rPr sz="1500" b="0" i="0">
+              <a:rPr sz="1300" b="0" i="0">
                 <a:solidFill>
                   <a:srgbClr val="1D2433"/>
                 </a:solidFill>
